--- a/docs/classes/02-27-aug-model-formulation/slides/model-formulation.pptx
+++ b/docs/classes/02-27-aug-model-formulation/slides/model-formulation.pptx
@@ -112,15 +112,12 @@
       </a:defRPr>
     </a:lvl9pPr>
   </p:defaultTextStyle>
+  <p:extLst>
+    <p:ext uri="{EFAFB233-063F-42B5-8137-9DF3F51BA10A}">
+      <p15:sldGuideLst xmlns:p15="http://schemas.microsoft.com/office/powerpoint/2012/main"/>
+    </p:ext>
+  </p:extLst>
 </p:presentation>
-</file>
-
-<file path=ppt/revisionInfo.xml><?xml version="1.0" encoding="utf-8"?>
-<p1510:revInfo xmlns:a="http://schemas.openxmlformats.org/drawingml/2006/main" xmlns:r="http://schemas.openxmlformats.org/officeDocument/2006/relationships" xmlns:p1510="http://schemas.microsoft.com/office/powerpoint/2015/10/main">
-  <p1510:revLst>
-    <p1510:client id="{EF8C41B8-82FF-4FA3-927F-9202C1AE3DAC}" v="546" dt="2026-08-04T09:32:15.625"/>
-  </p1510:revLst>
-</p1510:revInfo>
 </file>
 
 <file path=ppt/changesInfos/changesInfo1.xml><?xml version="1.0" encoding="utf-8"?>
@@ -128,7 +125,7 @@
   <pc:docChgLst>
     <pc:chgData name="Frederik Rask Dalby" userId="12c7c68b-47c4-4858-a883-dbd84be7356f" providerId="ADAL" clId="{E9883B15-7D20-4C63-9A3F-08E95C9A44CC}"/>
     <pc:docChg chg="undo custSel addSld modSld sldOrd">
-      <pc:chgData name="Frederik Rask Dalby" userId="12c7c68b-47c4-4858-a883-dbd84be7356f" providerId="ADAL" clId="{E9883B15-7D20-4C63-9A3F-08E95C9A44CC}" dt="2026-08-04T09:33:45.741" v="4172" actId="478"/>
+      <pc:chgData name="Frederik Rask Dalby" userId="12c7c68b-47c4-4858-a883-dbd84be7356f" providerId="ADAL" clId="{E9883B15-7D20-4C63-9A3F-08E95C9A44CC}" dt="2026-08-26T06:19:41.298" v="4174" actId="6549"/>
       <pc:docMkLst>
         <pc:docMk/>
       </pc:docMkLst>
@@ -169,14 +166,6 @@
             <ac:spMk id="2" creationId="{DC559609-575B-A46B-7153-0C7C4E2D9627}"/>
           </ac:spMkLst>
         </pc:spChg>
-        <pc:spChg chg="del mod">
-          <ac:chgData name="Frederik Rask Dalby" userId="12c7c68b-47c4-4858-a883-dbd84be7356f" providerId="ADAL" clId="{E9883B15-7D20-4C63-9A3F-08E95C9A44CC}" dt="2026-08-04T07:04:50.453" v="57" actId="478"/>
-          <ac:spMkLst>
-            <pc:docMk/>
-            <pc:sldMk cId="3689755566" sldId="257"/>
-            <ac:spMk id="3" creationId="{00128CAF-DC84-0758-7158-6AB994E65D2D}"/>
-          </ac:spMkLst>
-        </pc:spChg>
         <pc:picChg chg="add mod">
           <ac:chgData name="Frederik Rask Dalby" userId="12c7c68b-47c4-4858-a883-dbd84be7356f" providerId="ADAL" clId="{E9883B15-7D20-4C63-9A3F-08E95C9A44CC}" dt="2026-08-04T07:04:58.404" v="61" actId="1076"/>
           <ac:picMkLst>
@@ -206,14 +195,6 @@
             <pc:docMk/>
             <pc:sldMk cId="1121001776" sldId="258"/>
             <ac:spMk id="2" creationId="{8F081E5D-D730-85A9-BF92-6F6C58380259}"/>
-          </ac:spMkLst>
-        </pc:spChg>
-        <pc:spChg chg="del mod">
-          <ac:chgData name="Frederik Rask Dalby" userId="12c7c68b-47c4-4858-a883-dbd84be7356f" providerId="ADAL" clId="{E9883B15-7D20-4C63-9A3F-08E95C9A44CC}" dt="2026-08-04T07:11:37.782" v="121" actId="478"/>
-          <ac:spMkLst>
-            <pc:docMk/>
-            <pc:sldMk cId="1121001776" sldId="258"/>
-            <ac:spMk id="3" creationId="{0ACA584E-F627-6089-5D90-B2921266035B}"/>
           </ac:spMkLst>
         </pc:spChg>
         <pc:spChg chg="add mod">
@@ -256,38 +237,6 @@
             <ac:spMk id="15" creationId="{92316114-EFA6-A951-7CCD-78E2C7FB2E93}"/>
           </ac:spMkLst>
         </pc:spChg>
-        <pc:spChg chg="add del mod">
-          <ac:chgData name="Frederik Rask Dalby" userId="12c7c68b-47c4-4858-a883-dbd84be7356f" providerId="ADAL" clId="{E9883B15-7D20-4C63-9A3F-08E95C9A44CC}" dt="2026-08-04T07:21:23.879" v="494" actId="478"/>
-          <ac:spMkLst>
-            <pc:docMk/>
-            <pc:sldMk cId="1121001776" sldId="258"/>
-            <ac:spMk id="20" creationId="{FB8D63AB-03EF-136D-1B32-2402EB401D38}"/>
-          </ac:spMkLst>
-        </pc:spChg>
-        <pc:spChg chg="add del mod">
-          <ac:chgData name="Frederik Rask Dalby" userId="12c7c68b-47c4-4858-a883-dbd84be7356f" providerId="ADAL" clId="{E9883B15-7D20-4C63-9A3F-08E95C9A44CC}" dt="2026-08-04T07:23:05.044" v="629" actId="478"/>
-          <ac:spMkLst>
-            <pc:docMk/>
-            <pc:sldMk cId="1121001776" sldId="258"/>
-            <ac:spMk id="21" creationId="{64D20031-EA89-7BC7-2A7B-6461EE03AC84}"/>
-          </ac:spMkLst>
-        </pc:spChg>
-        <pc:spChg chg="add del mod">
-          <ac:chgData name="Frederik Rask Dalby" userId="12c7c68b-47c4-4858-a883-dbd84be7356f" providerId="ADAL" clId="{E9883B15-7D20-4C63-9A3F-08E95C9A44CC}" dt="2026-08-04T07:22:13.049" v="628" actId="478"/>
-          <ac:spMkLst>
-            <pc:docMk/>
-            <pc:sldMk cId="1121001776" sldId="258"/>
-            <ac:spMk id="22" creationId="{89D5D631-82F3-6985-4035-11A890DCC66C}"/>
-          </ac:spMkLst>
-        </pc:spChg>
-        <pc:spChg chg="add del mod">
-          <ac:chgData name="Frederik Rask Dalby" userId="12c7c68b-47c4-4858-a883-dbd84be7356f" providerId="ADAL" clId="{E9883B15-7D20-4C63-9A3F-08E95C9A44CC}" dt="2026-08-04T07:25:18.194" v="759" actId="478"/>
-          <ac:spMkLst>
-            <pc:docMk/>
-            <pc:sldMk cId="1121001776" sldId="258"/>
-            <ac:spMk id="23" creationId="{DC762D11-1EB7-8AA3-2F09-C27237F027BD}"/>
-          </ac:spMkLst>
-        </pc:spChg>
         <pc:spChg chg="add mod">
           <ac:chgData name="Frederik Rask Dalby" userId="12c7c68b-47c4-4858-a883-dbd84be7356f" providerId="ADAL" clId="{E9883B15-7D20-4C63-9A3F-08E95C9A44CC}" dt="2026-08-04T07:31:22.717" v="918" actId="1076"/>
           <ac:spMkLst>
@@ -304,30 +253,6 @@
             <ac:spMk id="29" creationId="{D5CE4A43-34C3-2606-7B97-BB98EAAEAAA3}"/>
           </ac:spMkLst>
         </pc:spChg>
-        <pc:picChg chg="add del mod">
-          <ac:chgData name="Frederik Rask Dalby" userId="12c7c68b-47c4-4858-a883-dbd84be7356f" providerId="ADAL" clId="{E9883B15-7D20-4C63-9A3F-08E95C9A44CC}" dt="2026-08-04T07:17:22.149" v="228" actId="478"/>
-          <ac:picMkLst>
-            <pc:docMk/>
-            <pc:sldMk cId="1121001776" sldId="258"/>
-            <ac:picMk id="5" creationId="{054CF20D-2E2E-AB7F-F55C-419FDF31774B}"/>
-          </ac:picMkLst>
-        </pc:picChg>
-        <pc:picChg chg="add del mod">
-          <ac:chgData name="Frederik Rask Dalby" userId="12c7c68b-47c4-4858-a883-dbd84be7356f" providerId="ADAL" clId="{E9883B15-7D20-4C63-9A3F-08E95C9A44CC}" dt="2026-08-04T07:17:21.419" v="227" actId="478"/>
-          <ac:picMkLst>
-            <pc:docMk/>
-            <pc:sldMk cId="1121001776" sldId="258"/>
-            <ac:picMk id="8" creationId="{7887A9B0-AB38-5464-7B65-5CB30D3A8352}"/>
-          </ac:picMkLst>
-        </pc:picChg>
-        <pc:picChg chg="add del mod">
-          <ac:chgData name="Frederik Rask Dalby" userId="12c7c68b-47c4-4858-a883-dbd84be7356f" providerId="ADAL" clId="{E9883B15-7D20-4C63-9A3F-08E95C9A44CC}" dt="2026-08-04T07:25:19.008" v="760" actId="478"/>
-          <ac:picMkLst>
-            <pc:docMk/>
-            <pc:sldMk cId="1121001776" sldId="258"/>
-            <ac:picMk id="19" creationId="{EF7E92B7-63B9-7810-1DE1-ED79BFB1A203}"/>
-          </ac:picMkLst>
-        </pc:picChg>
         <pc:picChg chg="add mod">
           <ac:chgData name="Frederik Rask Dalby" userId="12c7c68b-47c4-4858-a883-dbd84be7356f" providerId="ADAL" clId="{E9883B15-7D20-4C63-9A3F-08E95C9A44CC}" dt="2026-08-04T07:25:34.934" v="764" actId="1076"/>
           <ac:picMkLst>
@@ -375,22 +300,6 @@
           <pc:docMk/>
           <pc:sldMk cId="311067447" sldId="259"/>
         </pc:sldMkLst>
-        <pc:spChg chg="del">
-          <ac:chgData name="Frederik Rask Dalby" userId="12c7c68b-47c4-4858-a883-dbd84be7356f" providerId="ADAL" clId="{E9883B15-7D20-4C63-9A3F-08E95C9A44CC}" dt="2026-08-04T07:34:33.649" v="1023" actId="478"/>
-          <ac:spMkLst>
-            <pc:docMk/>
-            <pc:sldMk cId="311067447" sldId="259"/>
-            <ac:spMk id="2" creationId="{25C3F00C-877B-DF37-EB27-0F255F5EF19D}"/>
-          </ac:spMkLst>
-        </pc:spChg>
-        <pc:spChg chg="del">
-          <ac:chgData name="Frederik Rask Dalby" userId="12c7c68b-47c4-4858-a883-dbd84be7356f" providerId="ADAL" clId="{E9883B15-7D20-4C63-9A3F-08E95C9A44CC}" dt="2026-08-04T07:34:35.464" v="1024" actId="478"/>
-          <ac:spMkLst>
-            <pc:docMk/>
-            <pc:sldMk cId="311067447" sldId="259"/>
-            <ac:spMk id="3" creationId="{88E49824-BBAC-B7B6-7EAC-0EA120BD3EC6}"/>
-          </ac:spMkLst>
-        </pc:spChg>
         <pc:spChg chg="add mod">
           <ac:chgData name="Frederik Rask Dalby" userId="12c7c68b-47c4-4858-a883-dbd84be7356f" providerId="ADAL" clId="{E9883B15-7D20-4C63-9A3F-08E95C9A44CC}" dt="2026-08-04T07:35:19.246" v="1117" actId="1076"/>
           <ac:spMkLst>
@@ -444,14 +353,6 @@
             <pc:docMk/>
             <pc:sldMk cId="2220745484" sldId="260"/>
             <ac:spMk id="2" creationId="{C5DB7E79-2353-868D-8600-AD89177CAAEF}"/>
-          </ac:spMkLst>
-        </pc:spChg>
-        <pc:spChg chg="del">
-          <ac:chgData name="Frederik Rask Dalby" userId="12c7c68b-47c4-4858-a883-dbd84be7356f" providerId="ADAL" clId="{E9883B15-7D20-4C63-9A3F-08E95C9A44CC}" dt="2026-08-04T08:00:34.143" v="1170" actId="478"/>
-          <ac:spMkLst>
-            <pc:docMk/>
-            <pc:sldMk cId="2220745484" sldId="260"/>
-            <ac:spMk id="3" creationId="{586FAF07-88C2-3218-B158-0C692C6C4BF1}"/>
           </ac:spMkLst>
         </pc:spChg>
         <pc:spChg chg="add mod">
@@ -600,7 +501,7 @@
         </pc:cxnChg>
       </pc:sldChg>
       <pc:sldChg chg="addSp delSp modSp new mod">
-        <pc:chgData name="Frederik Rask Dalby" userId="12c7c68b-47c4-4858-a883-dbd84be7356f" providerId="ADAL" clId="{E9883B15-7D20-4C63-9A3F-08E95C9A44CC}" dt="2026-08-04T09:10:21.392" v="3296" actId="1076"/>
+        <pc:chgData name="Frederik Rask Dalby" userId="12c7c68b-47c4-4858-a883-dbd84be7356f" providerId="ADAL" clId="{E9883B15-7D20-4C63-9A3F-08E95C9A44CC}" dt="2026-08-26T06:19:41.298" v="4174" actId="6549"/>
         <pc:sldMkLst>
           <pc:docMk/>
           <pc:sldMk cId="318373816" sldId="261"/>
@@ -613,36 +514,12 @@
             <ac:spMk id="2" creationId="{E8D96BB2-92FC-CE3F-6012-6CA4DF42D53B}"/>
           </ac:spMkLst>
         </pc:spChg>
-        <pc:spChg chg="del mod">
-          <ac:chgData name="Frederik Rask Dalby" userId="12c7c68b-47c4-4858-a883-dbd84be7356f" providerId="ADAL" clId="{E9883B15-7D20-4C63-9A3F-08E95C9A44CC}" dt="2026-08-04T08:26:37.062" v="1856" actId="478"/>
-          <ac:spMkLst>
-            <pc:docMk/>
-            <pc:sldMk cId="318373816" sldId="261"/>
-            <ac:spMk id="3" creationId="{D08842E9-E68E-F279-60C8-26AD45FC7327}"/>
-          </ac:spMkLst>
-        </pc:spChg>
-        <pc:spChg chg="add del mod">
-          <ac:chgData name="Frederik Rask Dalby" userId="12c7c68b-47c4-4858-a883-dbd84be7356f" providerId="ADAL" clId="{E9883B15-7D20-4C63-9A3F-08E95C9A44CC}" dt="2026-08-04T08:26:19.741" v="1852" actId="478"/>
-          <ac:spMkLst>
-            <pc:docMk/>
-            <pc:sldMk cId="318373816" sldId="261"/>
-            <ac:spMk id="6" creationId="{8F006B77-C943-1622-CA5B-6139C2000A1D}"/>
-          </ac:spMkLst>
-        </pc:spChg>
         <pc:spChg chg="add mod">
           <ac:chgData name="Frederik Rask Dalby" userId="12c7c68b-47c4-4858-a883-dbd84be7356f" providerId="ADAL" clId="{E9883B15-7D20-4C63-9A3F-08E95C9A44CC}" dt="2026-08-04T08:29:44.622" v="2140" actId="20577"/>
           <ac:spMkLst>
             <pc:docMk/>
             <pc:sldMk cId="318373816" sldId="261"/>
             <ac:spMk id="8" creationId="{075A2322-5612-797E-5D5B-E241ABD5A3E4}"/>
-          </ac:spMkLst>
-        </pc:spChg>
-        <pc:spChg chg="add del mod">
-          <ac:chgData name="Frederik Rask Dalby" userId="12c7c68b-47c4-4858-a883-dbd84be7356f" providerId="ADAL" clId="{E9883B15-7D20-4C63-9A3F-08E95C9A44CC}" dt="2026-08-04T08:26:39.231" v="1857" actId="478"/>
-          <ac:spMkLst>
-            <pc:docMk/>
-            <pc:sldMk cId="318373816" sldId="261"/>
-            <ac:spMk id="10" creationId="{74F76744-3957-3671-139B-7EDC1FF6FDD4}"/>
           </ac:spMkLst>
         </pc:spChg>
         <pc:spChg chg="add mod">
@@ -654,19 +531,11 @@
           </ac:spMkLst>
         </pc:spChg>
         <pc:spChg chg="add mod">
-          <ac:chgData name="Frederik Rask Dalby" userId="12c7c68b-47c4-4858-a883-dbd84be7356f" providerId="ADAL" clId="{E9883B15-7D20-4C63-9A3F-08E95C9A44CC}" dt="2026-08-04T08:31:59.357" v="2153" actId="20577"/>
+          <ac:chgData name="Frederik Rask Dalby" userId="12c7c68b-47c4-4858-a883-dbd84be7356f" providerId="ADAL" clId="{E9883B15-7D20-4C63-9A3F-08E95C9A44CC}" dt="2026-08-26T06:19:41.298" v="4174" actId="6549"/>
           <ac:spMkLst>
             <pc:docMk/>
             <pc:sldMk cId="318373816" sldId="261"/>
             <ac:spMk id="14" creationId="{11BAF7B2-9B8A-0D0F-F9DF-700EC9445359}"/>
-          </ac:spMkLst>
-        </pc:spChg>
-        <pc:spChg chg="add del mod">
-          <ac:chgData name="Frederik Rask Dalby" userId="12c7c68b-47c4-4858-a883-dbd84be7356f" providerId="ADAL" clId="{E9883B15-7D20-4C63-9A3F-08E95C9A44CC}" dt="2026-08-04T08:28:49.332" v="2105" actId="478"/>
-          <ac:spMkLst>
-            <pc:docMk/>
-            <pc:sldMk cId="318373816" sldId="261"/>
-            <ac:spMk id="17" creationId="{8C661F95-1310-FCAC-F94B-4D9795589CB2}"/>
           </ac:spMkLst>
         </pc:spChg>
         <pc:spChg chg="add mod">
@@ -693,36 +562,12 @@
             <ac:spMk id="27" creationId="{758C4B38-3650-19DF-114D-020C664274DB}"/>
           </ac:spMkLst>
         </pc:spChg>
-        <pc:spChg chg="add del mod">
-          <ac:chgData name="Frederik Rask Dalby" userId="12c7c68b-47c4-4858-a883-dbd84be7356f" providerId="ADAL" clId="{E9883B15-7D20-4C63-9A3F-08E95C9A44CC}" dt="2026-08-04T09:09:36.784" v="3211" actId="478"/>
-          <ac:spMkLst>
-            <pc:docMk/>
-            <pc:sldMk cId="318373816" sldId="261"/>
-            <ac:spMk id="28" creationId="{8887E7B0-74F8-02D1-E7E9-E1420B64171A}"/>
-          </ac:spMkLst>
-        </pc:spChg>
         <pc:spChg chg="add mod">
           <ac:chgData name="Frederik Rask Dalby" userId="12c7c68b-47c4-4858-a883-dbd84be7356f" providerId="ADAL" clId="{E9883B15-7D20-4C63-9A3F-08E95C9A44CC}" dt="2026-08-04T09:09:28.134" v="3208" actId="20577"/>
           <ac:spMkLst>
             <pc:docMk/>
             <pc:sldMk cId="318373816" sldId="261"/>
             <ac:spMk id="30" creationId="{E6C61B89-4E6C-D7AF-3449-88A9F4A52A51}"/>
-          </ac:spMkLst>
-        </pc:spChg>
-        <pc:spChg chg="add del mod">
-          <ac:chgData name="Frederik Rask Dalby" userId="12c7c68b-47c4-4858-a883-dbd84be7356f" providerId="ADAL" clId="{E9883B15-7D20-4C63-9A3F-08E95C9A44CC}" dt="2026-08-04T08:35:09.580" v="2331" actId="478"/>
-          <ac:spMkLst>
-            <pc:docMk/>
-            <pc:sldMk cId="318373816" sldId="261"/>
-            <ac:spMk id="35" creationId="{0A04EF7F-1F9E-690C-B542-C5C00ED3783A}"/>
-          </ac:spMkLst>
-        </pc:spChg>
-        <pc:spChg chg="add del mod">
-          <ac:chgData name="Frederik Rask Dalby" userId="12c7c68b-47c4-4858-a883-dbd84be7356f" providerId="ADAL" clId="{E9883B15-7D20-4C63-9A3F-08E95C9A44CC}" dt="2026-08-04T08:35:26.843" v="2353"/>
-          <ac:spMkLst>
-            <pc:docMk/>
-            <pc:sldMk cId="318373816" sldId="261"/>
-            <ac:spMk id="36" creationId="{BBF6E619-E87A-7E58-4782-7F7D93CD8771}"/>
           </ac:spMkLst>
         </pc:spChg>
         <pc:spChg chg="add mod">
@@ -747,14 +592,6 @@
             <pc:docMk/>
             <pc:sldMk cId="318373816" sldId="261"/>
             <ac:picMk id="5" creationId="{5A9B7ACE-F35F-6B70-E04C-3FCF33BFFD48}"/>
-          </ac:picMkLst>
-        </pc:picChg>
-        <pc:picChg chg="add del mod">
-          <ac:chgData name="Frederik Rask Dalby" userId="12c7c68b-47c4-4858-a883-dbd84be7356f" providerId="ADAL" clId="{E9883B15-7D20-4C63-9A3F-08E95C9A44CC}" dt="2026-08-04T08:32:21.258" v="2159" actId="478"/>
-          <ac:picMkLst>
-            <pc:docMk/>
-            <pc:sldMk cId="318373816" sldId="261"/>
-            <ac:picMk id="24" creationId="{B6113F56-F74A-BE0A-67CF-EEEBB5AC6FF5}"/>
           </ac:picMkLst>
         </pc:picChg>
         <pc:picChg chg="add mod">
@@ -804,22 +641,6 @@
           <pc:docMk/>
           <pc:sldMk cId="298943071" sldId="262"/>
         </pc:sldMkLst>
-        <pc:spChg chg="del">
-          <ac:chgData name="Frederik Rask Dalby" userId="12c7c68b-47c4-4858-a883-dbd84be7356f" providerId="ADAL" clId="{E9883B15-7D20-4C63-9A3F-08E95C9A44CC}" dt="2026-08-04T08:37:38.077" v="2393" actId="478"/>
-          <ac:spMkLst>
-            <pc:docMk/>
-            <pc:sldMk cId="298943071" sldId="262"/>
-            <ac:spMk id="2" creationId="{88509472-098D-CA18-87B7-B749662856F9}"/>
-          </ac:spMkLst>
-        </pc:spChg>
-        <pc:spChg chg="del">
-          <ac:chgData name="Frederik Rask Dalby" userId="12c7c68b-47c4-4858-a883-dbd84be7356f" providerId="ADAL" clId="{E9883B15-7D20-4C63-9A3F-08E95C9A44CC}" dt="2026-08-04T08:37:39.946" v="2394" actId="478"/>
-          <ac:spMkLst>
-            <pc:docMk/>
-            <pc:sldMk cId="298943071" sldId="262"/>
-            <ac:spMk id="3" creationId="{23D84BA0-4F6D-B4B5-CEDE-9C077AD221C1}"/>
-          </ac:spMkLst>
-        </pc:spChg>
         <pc:spChg chg="add mod">
           <ac:chgData name="Frederik Rask Dalby" userId="12c7c68b-47c4-4858-a883-dbd84be7356f" providerId="ADAL" clId="{E9883B15-7D20-4C63-9A3F-08E95C9A44CC}" dt="2026-08-04T08:37:44.310" v="2402" actId="20577"/>
           <ac:spMkLst>
@@ -834,38 +655,6 @@
             <pc:docMk/>
             <pc:sldMk cId="298943071" sldId="262"/>
             <ac:spMk id="5" creationId="{E4AF7643-0C09-7766-4E06-2A4FCEA6ED81}"/>
-          </ac:spMkLst>
-        </pc:spChg>
-        <pc:spChg chg="add del mod">
-          <ac:chgData name="Frederik Rask Dalby" userId="12c7c68b-47c4-4858-a883-dbd84be7356f" providerId="ADAL" clId="{E9883B15-7D20-4C63-9A3F-08E95C9A44CC}" dt="2026-08-04T09:01:24.048" v="2774" actId="478"/>
-          <ac:spMkLst>
-            <pc:docMk/>
-            <pc:sldMk cId="298943071" sldId="262"/>
-            <ac:spMk id="8" creationId="{E85C7DE6-8E18-E626-8A24-DFF918E4AAB7}"/>
-          </ac:spMkLst>
-        </pc:spChg>
-        <pc:spChg chg="add del mod">
-          <ac:chgData name="Frederik Rask Dalby" userId="12c7c68b-47c4-4858-a883-dbd84be7356f" providerId="ADAL" clId="{E9883B15-7D20-4C63-9A3F-08E95C9A44CC}" dt="2026-08-04T09:01:15.144" v="2773" actId="478"/>
-          <ac:spMkLst>
-            <pc:docMk/>
-            <pc:sldMk cId="298943071" sldId="262"/>
-            <ac:spMk id="9" creationId="{36AD60B9-0AC2-A311-2395-E65CCA5E1674}"/>
-          </ac:spMkLst>
-        </pc:spChg>
-        <pc:spChg chg="add del mod">
-          <ac:chgData name="Frederik Rask Dalby" userId="12c7c68b-47c4-4858-a883-dbd84be7356f" providerId="ADAL" clId="{E9883B15-7D20-4C63-9A3F-08E95C9A44CC}" dt="2026-08-04T09:03:21.968" v="2800" actId="478"/>
-          <ac:spMkLst>
-            <pc:docMk/>
-            <pc:sldMk cId="298943071" sldId="262"/>
-            <ac:spMk id="10" creationId="{DB822608-5F16-628B-AD55-F62713A70A0F}"/>
-          </ac:spMkLst>
-        </pc:spChg>
-        <pc:spChg chg="add del mod">
-          <ac:chgData name="Frederik Rask Dalby" userId="12c7c68b-47c4-4858-a883-dbd84be7356f" providerId="ADAL" clId="{E9883B15-7D20-4C63-9A3F-08E95C9A44CC}" dt="2026-08-04T09:17:46.620" v="3477" actId="478"/>
-          <ac:spMkLst>
-            <pc:docMk/>
-            <pc:sldMk cId="298943071" sldId="262"/>
-            <ac:spMk id="12" creationId="{C9788502-DCA2-E888-ED28-F7E1399F87BE}"/>
           </ac:spMkLst>
         </pc:spChg>
         <pc:spChg chg="add mod">
@@ -892,44 +681,12 @@
             <ac:spMk id="20" creationId="{FAE1DCA0-80B0-2C7E-0E12-E01AEA0D8AC5}"/>
           </ac:spMkLst>
         </pc:spChg>
-        <pc:spChg chg="add del mod">
-          <ac:chgData name="Frederik Rask Dalby" userId="12c7c68b-47c4-4858-a883-dbd84be7356f" providerId="ADAL" clId="{E9883B15-7D20-4C63-9A3F-08E95C9A44CC}" dt="2026-08-04T09:17:43.004" v="3476" actId="478"/>
-          <ac:spMkLst>
-            <pc:docMk/>
-            <pc:sldMk cId="298943071" sldId="262"/>
-            <ac:spMk id="22" creationId="{CB8E61BC-C891-9423-F992-4A08D26E0C44}"/>
-          </ac:spMkLst>
-        </pc:spChg>
-        <pc:spChg chg="add del mod">
-          <ac:chgData name="Frederik Rask Dalby" userId="12c7c68b-47c4-4858-a883-dbd84be7356f" providerId="ADAL" clId="{E9883B15-7D20-4C63-9A3F-08E95C9A44CC}" dt="2026-08-04T09:17:40.908" v="3475" actId="478"/>
-          <ac:spMkLst>
-            <pc:docMk/>
-            <pc:sldMk cId="298943071" sldId="262"/>
-            <ac:spMk id="24" creationId="{5579D9B5-CBEB-5DF5-6DD9-9A2FCA8CC9ED}"/>
-          </ac:spMkLst>
-        </pc:spChg>
-        <pc:spChg chg="add del mod">
-          <ac:chgData name="Frederik Rask Dalby" userId="12c7c68b-47c4-4858-a883-dbd84be7356f" providerId="ADAL" clId="{E9883B15-7D20-4C63-9A3F-08E95C9A44CC}" dt="2026-08-04T09:17:38.087" v="3473" actId="478"/>
-          <ac:spMkLst>
-            <pc:docMk/>
-            <pc:sldMk cId="298943071" sldId="262"/>
-            <ac:spMk id="27" creationId="{E938D418-032A-9DE9-B1C2-E25D1C142E66}"/>
-          </ac:spMkLst>
-        </pc:spChg>
         <pc:spChg chg="add mod">
           <ac:chgData name="Frederik Rask Dalby" userId="12c7c68b-47c4-4858-a883-dbd84be7356f" providerId="ADAL" clId="{E9883B15-7D20-4C63-9A3F-08E95C9A44CC}" dt="2026-08-04T09:20:59.825" v="3584" actId="1076"/>
           <ac:spMkLst>
             <pc:docMk/>
             <pc:sldMk cId="298943071" sldId="262"/>
             <ac:spMk id="28" creationId="{36C0EF97-2A6C-8231-5986-BE01FB68F948}"/>
-          </ac:spMkLst>
-        </pc:spChg>
-        <pc:spChg chg="add del mod">
-          <ac:chgData name="Frederik Rask Dalby" userId="12c7c68b-47c4-4858-a883-dbd84be7356f" providerId="ADAL" clId="{E9883B15-7D20-4C63-9A3F-08E95C9A44CC}" dt="2026-08-04T09:19:30.817" v="3536" actId="478"/>
-          <ac:spMkLst>
-            <pc:docMk/>
-            <pc:sldMk cId="298943071" sldId="262"/>
-            <ac:spMk id="30" creationId="{0E98C3C8-F1FB-F41C-6A60-008853A0ED6E}"/>
           </ac:spMkLst>
         </pc:spChg>
         <pc:spChg chg="add mod">
@@ -964,22 +721,6 @@
             <ac:picMk id="33" creationId="{DBC9A6BE-54F5-E172-D2FA-83A517B5FFA8}"/>
           </ac:picMkLst>
         </pc:picChg>
-        <pc:cxnChg chg="add del mod">
-          <ac:chgData name="Frederik Rask Dalby" userId="12c7c68b-47c4-4858-a883-dbd84be7356f" providerId="ADAL" clId="{E9883B15-7D20-4C63-9A3F-08E95C9A44CC}" dt="2026-08-04T09:01:47.245" v="2786" actId="478"/>
-          <ac:cxnSpMkLst>
-            <pc:docMk/>
-            <pc:sldMk cId="298943071" sldId="262"/>
-            <ac:cxnSpMk id="7" creationId="{1F23E5EA-945E-9A3B-DE1C-8B7349373241}"/>
-          </ac:cxnSpMkLst>
-        </pc:cxnChg>
-        <pc:cxnChg chg="add del mod">
-          <ac:chgData name="Frederik Rask Dalby" userId="12c7c68b-47c4-4858-a883-dbd84be7356f" providerId="ADAL" clId="{E9883B15-7D20-4C63-9A3F-08E95C9A44CC}" dt="2026-08-04T09:17:39.131" v="3474" actId="478"/>
-          <ac:cxnSpMkLst>
-            <pc:docMk/>
-            <pc:sldMk cId="298943071" sldId="262"/>
-            <ac:cxnSpMk id="26" creationId="{BA7B9117-3431-0884-3211-78F61B7FEE0A}"/>
-          </ac:cxnSpMkLst>
-        </pc:cxnChg>
       </pc:sldChg>
       <pc:sldChg chg="addSp delSp modSp new mod ord">
         <pc:chgData name="Frederik Rask Dalby" userId="12c7c68b-47c4-4858-a883-dbd84be7356f" providerId="ADAL" clId="{E9883B15-7D20-4C63-9A3F-08E95C9A44CC}" dt="2026-08-04T09:07:14.051" v="3111" actId="20577"/>
@@ -993,14 +734,6 @@
             <pc:docMk/>
             <pc:sldMk cId="4141506904" sldId="263"/>
             <ac:spMk id="2" creationId="{4EC58650-49EA-AE82-9321-C21D6EA56129}"/>
-          </ac:spMkLst>
-        </pc:spChg>
-        <pc:spChg chg="del mod">
-          <ac:chgData name="Frederik Rask Dalby" userId="12c7c68b-47c4-4858-a883-dbd84be7356f" providerId="ADAL" clId="{E9883B15-7D20-4C63-9A3F-08E95C9A44CC}" dt="2026-08-04T09:06:55.986" v="3099" actId="22"/>
-          <ac:spMkLst>
-            <pc:docMk/>
-            <pc:sldMk cId="4141506904" sldId="263"/>
-            <ac:spMk id="3" creationId="{BA327F76-F047-1F8E-757B-397DBD97F5BE}"/>
           </ac:spMkLst>
         </pc:spChg>
         <pc:picChg chg="add mod ord">
@@ -1032,14 +765,6 @@
             <pc:docMk/>
             <pc:sldMk cId="2591365496" sldId="264"/>
             <ac:spMk id="3" creationId="{E78F9C37-EB77-E194-BB44-643016EF1D40}"/>
-          </ac:spMkLst>
-        </pc:spChg>
-        <pc:spChg chg="add del mod">
-          <ac:chgData name="Frederik Rask Dalby" userId="12c7c68b-47c4-4858-a883-dbd84be7356f" providerId="ADAL" clId="{E9883B15-7D20-4C63-9A3F-08E95C9A44CC}" dt="2026-08-04T09:33:45.741" v="4172" actId="478"/>
-          <ac:spMkLst>
-            <pc:docMk/>
-            <pc:sldMk cId="2591365496" sldId="264"/>
-            <ac:spMk id="5" creationId="{2476F33B-8854-3871-16D6-311012FC2E84}"/>
           </ac:spMkLst>
         </pc:spChg>
         <pc:spChg chg="add mod">
@@ -1309,7 +1034,7 @@
           <a:p>
             <a:fld id="{0D1D16D5-9732-419F-82C2-30EA452DE896}" type="datetimeFigureOut">
               <a:rPr lang="da-DK" smtClean="0"/>
-              <a:t>04-08-2026</a:t>
+              <a:t>26-08-2026</a:t>
             </a:fld>
             <a:endParaRPr lang="da-DK"/>
           </a:p>
@@ -1509,7 +1234,7 @@
           <a:p>
             <a:fld id="{0D1D16D5-9732-419F-82C2-30EA452DE896}" type="datetimeFigureOut">
               <a:rPr lang="da-DK" smtClean="0"/>
-              <a:t>04-08-2026</a:t>
+              <a:t>26-08-2026</a:t>
             </a:fld>
             <a:endParaRPr lang="da-DK"/>
           </a:p>
@@ -1719,7 +1444,7 @@
           <a:p>
             <a:fld id="{0D1D16D5-9732-419F-82C2-30EA452DE896}" type="datetimeFigureOut">
               <a:rPr lang="da-DK" smtClean="0"/>
-              <a:t>04-08-2026</a:t>
+              <a:t>26-08-2026</a:t>
             </a:fld>
             <a:endParaRPr lang="da-DK"/>
           </a:p>
@@ -1919,7 +1644,7 @@
           <a:p>
             <a:fld id="{0D1D16D5-9732-419F-82C2-30EA452DE896}" type="datetimeFigureOut">
               <a:rPr lang="da-DK" smtClean="0"/>
-              <a:t>04-08-2026</a:t>
+              <a:t>26-08-2026</a:t>
             </a:fld>
             <a:endParaRPr lang="da-DK"/>
           </a:p>
@@ -2195,7 +1920,7 @@
           <a:p>
             <a:fld id="{0D1D16D5-9732-419F-82C2-30EA452DE896}" type="datetimeFigureOut">
               <a:rPr lang="da-DK" smtClean="0"/>
-              <a:t>04-08-2026</a:t>
+              <a:t>26-08-2026</a:t>
             </a:fld>
             <a:endParaRPr lang="da-DK"/>
           </a:p>
@@ -2463,7 +2188,7 @@
           <a:p>
             <a:fld id="{0D1D16D5-9732-419F-82C2-30EA452DE896}" type="datetimeFigureOut">
               <a:rPr lang="da-DK" smtClean="0"/>
-              <a:t>04-08-2026</a:t>
+              <a:t>26-08-2026</a:t>
             </a:fld>
             <a:endParaRPr lang="da-DK"/>
           </a:p>
@@ -2878,7 +2603,7 @@
           <a:p>
             <a:fld id="{0D1D16D5-9732-419F-82C2-30EA452DE896}" type="datetimeFigureOut">
               <a:rPr lang="da-DK" smtClean="0"/>
-              <a:t>04-08-2026</a:t>
+              <a:t>26-08-2026</a:t>
             </a:fld>
             <a:endParaRPr lang="da-DK"/>
           </a:p>
@@ -3020,7 +2745,7 @@
           <a:p>
             <a:fld id="{0D1D16D5-9732-419F-82C2-30EA452DE896}" type="datetimeFigureOut">
               <a:rPr lang="da-DK" smtClean="0"/>
-              <a:t>04-08-2026</a:t>
+              <a:t>26-08-2026</a:t>
             </a:fld>
             <a:endParaRPr lang="da-DK"/>
           </a:p>
@@ -3133,7 +2858,7 @@
           <a:p>
             <a:fld id="{0D1D16D5-9732-419F-82C2-30EA452DE896}" type="datetimeFigureOut">
               <a:rPr lang="da-DK" smtClean="0"/>
-              <a:t>04-08-2026</a:t>
+              <a:t>26-08-2026</a:t>
             </a:fld>
             <a:endParaRPr lang="da-DK"/>
           </a:p>
@@ -3446,7 +3171,7 @@
           <a:p>
             <a:fld id="{0D1D16D5-9732-419F-82C2-30EA452DE896}" type="datetimeFigureOut">
               <a:rPr lang="da-DK" smtClean="0"/>
-              <a:t>04-08-2026</a:t>
+              <a:t>26-08-2026</a:t>
             </a:fld>
             <a:endParaRPr lang="da-DK"/>
           </a:p>
@@ -3735,7 +3460,7 @@
           <a:p>
             <a:fld id="{0D1D16D5-9732-419F-82C2-30EA452DE896}" type="datetimeFigureOut">
               <a:rPr lang="da-DK" smtClean="0"/>
-              <a:t>04-08-2026</a:t>
+              <a:t>26-08-2026</a:t>
             </a:fld>
             <a:endParaRPr lang="da-DK"/>
           </a:p>
@@ -3978,7 +3703,7 @@
           <a:p>
             <a:fld id="{0D1D16D5-9732-419F-82C2-30EA452DE896}" type="datetimeFigureOut">
               <a:rPr lang="da-DK" smtClean="0"/>
-              <a:t>04-08-2026</a:t>
+              <a:t>26-08-2026</a:t>
             </a:fld>
             <a:endParaRPr lang="da-DK"/>
           </a:p>
@@ -5247,8 +4972,8 @@
           </a:p>
         </p:txBody>
       </p:sp>
-      <mc:AlternateContent xmlns:mc="http://schemas.openxmlformats.org/markup-compatibility/2006">
-        <mc:Choice xmlns:a14="http://schemas.microsoft.com/office/drawing/2010/main" Requires="a14">
+      <mc:AlternateContent xmlns:mc="http://schemas.openxmlformats.org/markup-compatibility/2006" xmlns:a14="http://schemas.microsoft.com/office/drawing/2010/main">
+        <mc:Choice Requires="a14">
           <p:sp>
             <p:nvSpPr>
               <p:cNvPr id="29" name="TextBox 28">
@@ -5341,7 +5066,7 @@
             </p:txBody>
           </p:sp>
         </mc:Choice>
-        <mc:Fallback>
+        <mc:Fallback xmlns="">
           <p:sp>
             <p:nvSpPr>
               <p:cNvPr id="29" name="TextBox 28">
@@ -7312,7 +7037,7 @@
             </a:r>
             <a:r>
               <a:rPr lang="da-DK" sz="1800" dirty="0"/>
-              <a:t> drives ”– Out”?</a:t>
+              <a:t> drives ”Out”?</a:t>
             </a:r>
             <a:endParaRPr lang="da-DK" dirty="0"/>
           </a:p>
@@ -7662,8 +7387,8 @@
           </a:p>
         </p:txBody>
       </p:sp>
-      <mc:AlternateContent xmlns:mc="http://schemas.openxmlformats.org/markup-compatibility/2006">
-        <mc:Choice xmlns:a14="http://schemas.microsoft.com/office/drawing/2010/main" Requires="a14">
+      <mc:AlternateContent xmlns:mc="http://schemas.openxmlformats.org/markup-compatibility/2006" xmlns:a14="http://schemas.microsoft.com/office/drawing/2010/main">
+        <mc:Choice Requires="a14">
           <p:sp>
             <p:nvSpPr>
               <p:cNvPr id="30" name="TextBox 29">
@@ -7692,6 +7417,7 @@
               </a:bodyPr>
               <a:lstStyle/>
               <a:p>
+                <a:pPr/>
                 <a14:m>
                   <m:oMathPara xmlns:m="http://schemas.openxmlformats.org/officeDocument/2006/math">
                     <m:oMath>
@@ -7721,6 +7447,7 @@
                 </a:endParaRPr>
               </a:p>
               <a:p>
+                <a:pPr/>
                 <a14:m>
                   <m:oMathPara xmlns:m="http://schemas.openxmlformats.org/officeDocument/2006/math">
                     <m:oMath>
@@ -7868,7 +7595,7 @@
             </p:txBody>
           </p:sp>
         </mc:Choice>
-        <mc:Fallback>
+        <mc:Fallback xmlns="">
           <p:sp>
             <p:nvSpPr>
               <p:cNvPr id="30" name="TextBox 29">
@@ -7991,8 +7718,8 @@
           </a:fontRef>
         </p:style>
       </p:cxnSp>
-      <mc:AlternateContent xmlns:mc="http://schemas.openxmlformats.org/markup-compatibility/2006">
-        <mc:Choice xmlns:a14="http://schemas.microsoft.com/office/drawing/2010/main" Requires="a14">
+      <mc:AlternateContent xmlns:mc="http://schemas.openxmlformats.org/markup-compatibility/2006" xmlns:a14="http://schemas.microsoft.com/office/drawing/2010/main">
+        <mc:Choice Requires="a14">
           <p:sp>
             <p:nvSpPr>
               <p:cNvPr id="37" name="TextBox 36">
@@ -8021,6 +7748,7 @@
               </a:bodyPr>
               <a:lstStyle/>
               <a:p>
+                <a:pPr/>
                 <a14:m>
                   <m:oMathPara xmlns:m="http://schemas.openxmlformats.org/officeDocument/2006/math">
                     <m:oMath>
@@ -8038,6 +7766,7 @@
                 </a:endParaRPr>
               </a:p>
               <a:p>
+                <a:pPr/>
                 <a14:m>
                   <m:oMathPara xmlns:m="http://schemas.openxmlformats.org/officeDocument/2006/math">
                     <m:oMath>
@@ -8161,7 +7890,7 @@
             </p:txBody>
           </p:sp>
         </mc:Choice>
-        <mc:Fallback>
+        <mc:Fallback xmlns="">
           <p:sp>
             <p:nvSpPr>
               <p:cNvPr id="37" name="TextBox 36">
@@ -8206,8 +7935,8 @@
           </p:sp>
         </mc:Fallback>
       </mc:AlternateContent>
-      <mc:AlternateContent xmlns:mc="http://schemas.openxmlformats.org/markup-compatibility/2006">
-        <mc:Choice xmlns:a14="http://schemas.microsoft.com/office/drawing/2010/main" Requires="a14">
+      <mc:AlternateContent xmlns:mc="http://schemas.openxmlformats.org/markup-compatibility/2006" xmlns:a14="http://schemas.microsoft.com/office/drawing/2010/main">
+        <mc:Choice Requires="a14">
           <p:sp>
             <p:nvSpPr>
               <p:cNvPr id="39" name="TextBox 38">
@@ -8314,7 +8043,7 @@
             </p:txBody>
           </p:sp>
         </mc:Choice>
-        <mc:Fallback>
+        <mc:Fallback xmlns="">
           <p:sp>
             <p:nvSpPr>
               <p:cNvPr id="39" name="TextBox 38">
@@ -8540,8 +8269,8 @@
           </a:p>
         </p:txBody>
       </p:sp>
-      <mc:AlternateContent xmlns:mc="http://schemas.openxmlformats.org/markup-compatibility/2006">
-        <mc:Choice xmlns:a14="http://schemas.microsoft.com/office/drawing/2010/main" Requires="a14">
+      <mc:AlternateContent xmlns:mc="http://schemas.openxmlformats.org/markup-compatibility/2006" xmlns:a14="http://schemas.microsoft.com/office/drawing/2010/main">
+        <mc:Choice Requires="a14">
           <p:sp>
             <p:nvSpPr>
               <p:cNvPr id="14" name="TextBox 13">
@@ -8605,7 +8334,7 @@
             </p:txBody>
           </p:sp>
         </mc:Choice>
-        <mc:Fallback>
+        <mc:Fallback xmlns="">
           <p:sp>
             <p:nvSpPr>
               <p:cNvPr id="14" name="TextBox 13">
@@ -8650,8 +8379,8 @@
           </p:sp>
         </mc:Fallback>
       </mc:AlternateContent>
-      <mc:AlternateContent xmlns:mc="http://schemas.openxmlformats.org/markup-compatibility/2006">
-        <mc:Choice xmlns:a14="http://schemas.microsoft.com/office/drawing/2010/main" Requires="a14">
+      <mc:AlternateContent xmlns:mc="http://schemas.openxmlformats.org/markup-compatibility/2006" xmlns:a14="http://schemas.microsoft.com/office/drawing/2010/main">
+        <mc:Choice Requires="a14">
           <p:sp>
             <p:nvSpPr>
               <p:cNvPr id="16" name="TextBox 15">
@@ -8786,7 +8515,7 @@
             </p:txBody>
           </p:sp>
         </mc:Choice>
-        <mc:Fallback>
+        <mc:Fallback xmlns="">
           <p:sp>
             <p:nvSpPr>
               <p:cNvPr id="16" name="TextBox 15">
@@ -8889,7 +8618,6 @@
           </a:bodyPr>
           <a:lstStyle/>
           <a:p>
-            <a:pPr/>
             <a:endParaRPr lang="da-DK" dirty="0"/>
           </a:p>
           <a:p>
@@ -8900,8 +8628,8 @@
           </a:p>
         </p:txBody>
       </p:sp>
-      <mc:AlternateContent xmlns:mc="http://schemas.openxmlformats.org/markup-compatibility/2006">
-        <mc:Choice xmlns:a14="http://schemas.microsoft.com/office/drawing/2010/main" Requires="a14">
+      <mc:AlternateContent xmlns:mc="http://schemas.openxmlformats.org/markup-compatibility/2006" xmlns:a14="http://schemas.microsoft.com/office/drawing/2010/main">
+        <mc:Choice Requires="a14">
           <p:sp>
             <p:nvSpPr>
               <p:cNvPr id="28" name="TextBox 27">
@@ -8930,6 +8658,7 @@
               </a:bodyPr>
               <a:lstStyle/>
               <a:p>
+                <a:pPr/>
                 <a14:m>
                   <m:oMathPara xmlns:m="http://schemas.openxmlformats.org/officeDocument/2006/math">
                     <m:oMath>
@@ -9042,7 +8771,7 @@
             </p:txBody>
           </p:sp>
         </mc:Choice>
-        <mc:Fallback>
+        <mc:Fallback xmlns="">
           <p:sp>
             <p:nvSpPr>
               <p:cNvPr id="28" name="TextBox 27">
@@ -9087,8 +8816,8 @@
           </p:sp>
         </mc:Fallback>
       </mc:AlternateContent>
-      <mc:AlternateContent xmlns:mc="http://schemas.openxmlformats.org/markup-compatibility/2006">
-        <mc:Choice xmlns:a14="http://schemas.microsoft.com/office/drawing/2010/main" Requires="a14">
+      <mc:AlternateContent xmlns:mc="http://schemas.openxmlformats.org/markup-compatibility/2006" xmlns:a14="http://schemas.microsoft.com/office/drawing/2010/main">
+        <mc:Choice Requires="a14">
           <p:sp>
             <p:nvSpPr>
               <p:cNvPr id="31" name="TextBox 30">
@@ -9117,6 +8846,7 @@
               </a:bodyPr>
               <a:lstStyle/>
               <a:p>
+                <a:pPr/>
                 <a14:m>
                   <m:oMathPara xmlns:m="http://schemas.openxmlformats.org/officeDocument/2006/math">
                     <m:oMath>
@@ -9142,7 +8872,7 @@
             </p:txBody>
           </p:sp>
         </mc:Choice>
-        <mc:Fallback>
+        <mc:Fallback xmlns="">
           <p:sp>
             <p:nvSpPr>
               <p:cNvPr id="31" name="TextBox 30">
@@ -9436,8 +9166,8 @@
           </a:p>
         </p:txBody>
       </p:sp>
-      <mc:AlternateContent xmlns:mc="http://schemas.openxmlformats.org/markup-compatibility/2006">
-        <mc:Choice xmlns:a14="http://schemas.microsoft.com/office/drawing/2010/main" Requires="a14">
+      <mc:AlternateContent xmlns:mc="http://schemas.openxmlformats.org/markup-compatibility/2006" xmlns:a14="http://schemas.microsoft.com/office/drawing/2010/main">
+        <mc:Choice Requires="a14">
           <p:sp>
             <p:nvSpPr>
               <p:cNvPr id="7" name="TextBox 6">
@@ -9543,7 +9273,7 @@
             </p:txBody>
           </p:sp>
         </mc:Choice>
-        <mc:Fallback>
+        <mc:Fallback xmlns="">
           <p:sp>
             <p:nvSpPr>
               <p:cNvPr id="7" name="TextBox 6">
@@ -9588,8 +9318,8 @@
           </p:sp>
         </mc:Fallback>
       </mc:AlternateContent>
-      <mc:AlternateContent xmlns:mc="http://schemas.openxmlformats.org/markup-compatibility/2006">
-        <mc:Choice xmlns:a14="http://schemas.microsoft.com/office/drawing/2010/main" Requires="a14">
+      <mc:AlternateContent xmlns:mc="http://schemas.openxmlformats.org/markup-compatibility/2006" xmlns:a14="http://schemas.microsoft.com/office/drawing/2010/main">
+        <mc:Choice Requires="a14">
           <p:sp>
             <p:nvSpPr>
               <p:cNvPr id="9" name="TextBox 8">
@@ -9618,7 +9348,6 @@
               </a:bodyPr>
               <a:lstStyle/>
               <a:p>
-                <a:pPr/>
                 <a14:m>
                   <m:oMath xmlns:m="http://schemas.openxmlformats.org/officeDocument/2006/math">
                     <m:r>
@@ -9654,7 +9383,7 @@
             </p:txBody>
           </p:sp>
         </mc:Choice>
-        <mc:Fallback>
+        <mc:Fallback xmlns="">
           <p:sp>
             <p:nvSpPr>
               <p:cNvPr id="9" name="TextBox 8">
@@ -9742,8 +9471,8 @@
           </a:p>
         </p:txBody>
       </p:sp>
-      <mc:AlternateContent xmlns:mc="http://schemas.openxmlformats.org/markup-compatibility/2006">
-        <mc:Choice xmlns:a14="http://schemas.microsoft.com/office/drawing/2010/main" Requires="a14">
+      <mc:AlternateContent xmlns:mc="http://schemas.openxmlformats.org/markup-compatibility/2006" xmlns:a14="http://schemas.microsoft.com/office/drawing/2010/main">
+        <mc:Choice Requires="a14">
           <p:sp>
             <p:nvSpPr>
               <p:cNvPr id="12" name="TextBox 11">
@@ -9893,7 +9622,7 @@
             </p:txBody>
           </p:sp>
         </mc:Choice>
-        <mc:Fallback>
+        <mc:Fallback xmlns="">
           <p:sp>
             <p:nvSpPr>
               <p:cNvPr id="12" name="TextBox 11">
@@ -9938,8 +9667,8 @@
           </p:sp>
         </mc:Fallback>
       </mc:AlternateContent>
-      <mc:AlternateContent xmlns:mc="http://schemas.openxmlformats.org/markup-compatibility/2006">
-        <mc:Choice xmlns:a14="http://schemas.microsoft.com/office/drawing/2010/main" Requires="a14">
+      <mc:AlternateContent xmlns:mc="http://schemas.openxmlformats.org/markup-compatibility/2006" xmlns:a14="http://schemas.microsoft.com/office/drawing/2010/main">
+        <mc:Choice Requires="a14">
           <p:sp>
             <p:nvSpPr>
               <p:cNvPr id="14" name="TextBox 13">
@@ -10124,7 +9853,7 @@
             </p:txBody>
           </p:sp>
         </mc:Choice>
-        <mc:Fallback>
+        <mc:Fallback xmlns="">
           <p:sp>
             <p:nvSpPr>
               <p:cNvPr id="14" name="TextBox 13">
@@ -10337,8 +10066,8 @@
           </a:p>
         </p:txBody>
       </p:sp>
-      <mc:AlternateContent xmlns:mc="http://schemas.openxmlformats.org/markup-compatibility/2006">
-        <mc:Choice xmlns:a14="http://schemas.microsoft.com/office/drawing/2010/main" Requires="a14">
+      <mc:AlternateContent xmlns:mc="http://schemas.openxmlformats.org/markup-compatibility/2006" xmlns:a14="http://schemas.microsoft.com/office/drawing/2010/main">
+        <mc:Choice Requires="a14">
           <p:sp>
             <p:nvSpPr>
               <p:cNvPr id="22" name="TextBox 21">
@@ -10436,14 +10165,7 @@
                             <a:latin typeface="Cambria Math" panose="02040503050406030204" pitchFamily="18" charset="0"/>
                             <a:sym typeface="Wingdings" panose="05000000000000000000" pitchFamily="2" charset="2"/>
                           </a:rPr>
-                          <m:t>𝑑</m:t>
-                        </m:r>
-                        <m:r>
-                          <a:rPr lang="da-DK" sz="1800" b="0" i="1" smtClean="0">
-                            <a:latin typeface="Cambria Math" panose="02040503050406030204" pitchFamily="18" charset="0"/>
-                            <a:sym typeface="Wingdings" panose="05000000000000000000" pitchFamily="2" charset="2"/>
-                          </a:rPr>
-                          <m:t>𝑇</m:t>
+                          <m:t>𝑑𝑇</m:t>
                         </m:r>
                       </m:num>
                       <m:den>
@@ -10582,7 +10304,7 @@
             </p:txBody>
           </p:sp>
         </mc:Choice>
-        <mc:Fallback>
+        <mc:Fallback xmlns="">
           <p:sp>
             <p:nvSpPr>
               <p:cNvPr id="22" name="TextBox 21">
@@ -10667,8 +10389,8 @@
           </a:p>
         </p:txBody>
       </p:sp>
-      <mc:AlternateContent xmlns:mc="http://schemas.openxmlformats.org/markup-compatibility/2006">
-        <mc:Choice xmlns:a14="http://schemas.microsoft.com/office/drawing/2010/main" Requires="a14">
+      <mc:AlternateContent xmlns:mc="http://schemas.openxmlformats.org/markup-compatibility/2006" xmlns:a14="http://schemas.microsoft.com/office/drawing/2010/main">
+        <mc:Choice Requires="a14">
           <p:sp>
             <p:nvSpPr>
               <p:cNvPr id="26" name="TextBox 25">
@@ -11001,7 +10723,7 @@
             </p:txBody>
           </p:sp>
         </mc:Choice>
-        <mc:Fallback>
+        <mc:Fallback xmlns="">
           <p:sp>
             <p:nvSpPr>
               <p:cNvPr id="26" name="TextBox 25">
